--- a/viz/8.23组会汇报_可视化暑期进展_孙承泽.pptx
+++ b/viz/8.23组会汇报_可视化暑期进展_孙承泽.pptx
@@ -3456,7 +3456,7 @@
               </a:defRPr>
             </a:pPr>
             <a:r>
-              <a:t>09 / DATA INTEGRITY AUDIT AND CONTRACT VALIDATION</a:t>
+              <a:t>09 / PS 300DPI &amp; PPT SWISS GRID: RESEARCH VISUALIZATION STANDARDS</a:t>
             </a:r>
           </a:p>
           <a:p>
@@ -3469,7 +3469,7 @@
               </a:defRPr>
             </a:pPr>
             <a:r>
-              <a:t>全域零暗黑硬编码、零 Emoji 装饰、零伪冒陈旧数据，确保诚信可推演</a:t>
+              <a:t>暑期专攻 PS 300DPI 顶刊分层制图与 PPT 瑞士国际主义网格学术排版规范</a:t>
             </a:r>
           </a:p>
         </p:txBody>
@@ -3617,13 +3617,13 @@
               <a:defRPr sz="1600" b="1"/>
             </a:pPr>
             <a:r>
-              <a:t>A~H 项全站诚信确权自检清单：</a:t>
+              <a:t>PS 300DPI 顶刊级科研分层制图探索：</a:t>
             </a:r>
           </a:p>
           <a:p>
             <a:pPr>
               <a:spcBef>
-                <a:spcPts val="1200"/>
+                <a:spcPts val="1400"/>
               </a:spcBef>
               <a:defRPr sz="1300">
                 <a:solidFill>
@@ -3632,13 +3632,13 @@
               </a:defRPr>
             </a:pPr>
             <a:r>
-              <a:t>• 彻底删除陈旧宣传伪词：全站清退 '7000吨 / 340万元 / 42.5%' 等未经验证的描述；</a:t>
+              <a:t>• 顶刊规范打底：严格按 Nature / IEEE 标准开展 300DPI 矢量与云图探索 (generate_figure_psd.py)；</a:t>
             </a:r>
           </a:p>
           <a:p>
             <a:pPr>
               <a:spcBef>
-                <a:spcPts val="1200"/>
+                <a:spcPts val="1400"/>
               </a:spcBef>
               <a:defRPr sz="1300">
                 <a:solidFill>
@@ -3647,13 +3647,13 @@
               </a:defRPr>
             </a:pPr>
             <a:r>
-              <a:t>• FLORIS 原生口径咬合：5D 双机自然 2190 kW / 偏航 2368 kW (+8.13%) 逐字节吻合；</a:t>
+              <a:t>• 分层工程化管理：掌握 5 分层组结构规范与智能对象管理，彻底消除缩放脏边与伪影；</a:t>
             </a:r>
           </a:p>
           <a:p>
             <a:pPr>
               <a:spcBef>
-                <a:spcPts val="1200"/>
+                <a:spcPts val="1400"/>
               </a:spcBef>
               <a:defRPr sz="1300">
                 <a:solidFill>
@@ -3662,82 +3662,83 @@
               </a:defRPr>
             </a:pPr>
             <a:r>
-              <a:t>• 纠正假象数据：array.html 精确区分自然 8095、第一排 9299、前两排 9935 与贪心 10041 kW 物理梯级。</a:t>
-            </a:r>
-          </a:p>
-        </p:txBody>
-      </p:sp>
-      <p:sp>
-        <p:nvSpPr>
-          <p:cNvPr id="8" name="Rectangle 7"/>
-          <p:cNvSpPr/>
+              <a:t>• 印刷与大屏双适配：为下阶段学术论文投稿、大创考核报告与 A0 实物海报展板准备可出版级图源。</a:t>
+            </a:r>
+          </a:p>
+        </p:txBody>
+      </p:sp>
+      <p:sp>
+        <p:nvSpPr>
+          <p:cNvPr id="8" name="TextBox 7"/>
+          <p:cNvSpPr txBox="1"/>
           <p:nvPr/>
         </p:nvSpPr>
         <p:spPr>
           <a:xfrm>
             <a:off x="6309360" y="1645920"/>
-            <a:ext cx="5120640" cy="3840480"/>
+            <a:ext cx="5120640" cy="4114800"/>
           </a:xfrm>
           <a:prstGeom prst="rect">
             <a:avLst/>
           </a:prstGeom>
-          <a:solidFill>
-            <a:srgbClr val="1D2024"/>
-          </a:solidFill>
-        </p:spPr>
-        <p:style>
-          <a:lnRef idx="1">
-            <a:schemeClr val="accent1"/>
-          </a:lnRef>
-          <a:fillRef idx="3">
-            <a:schemeClr val="accent1"/>
-          </a:fillRef>
-          <a:effectRef idx="2">
-            <a:schemeClr val="accent1"/>
-          </a:effectRef>
-          <a:fontRef idx="minor">
-            <a:schemeClr val="lt1"/>
-          </a:fontRef>
-        </p:style>
-        <p:txBody>
-          <a:bodyPr rtlCol="0" anchor="ctr" wrap="square"/>
-          <a:lstStyle/>
-          <a:p>
-            <a:pPr algn="ctr">
-              <a:defRPr sz="1200" b="1">
-                <a:solidFill>
-                  <a:srgbClr val="4AF626"/>
-                </a:solidFill>
-                <a:latin typeface="JetBrains Mono"/>
-              </a:defRPr>
+          <a:noFill/>
+        </p:spPr>
+        <p:txBody>
+          <a:bodyPr wrap="square">
+            <a:spAutoFit/>
+          </a:bodyPr>
+          <a:lstStyle/>
+          <a:p>
+            <a:pPr>
+              <a:defRPr sz="1600" b="1"/>
             </a:pPr>
             <a:r>
-              <a:t>$ python3 site/check_contract.py</a:t>
-            </a:r>
-            <a:br/>
-            <a:r>
-              <a:t>==========================================================</a:t>
-            </a:r>
-            <a:br/>
-            <a:r>
-              <a:t>✅ 契约校验通过：data.js / data_3d.js 结构与数值一致。</a:t>
-            </a:r>
-            <a:br/>
-            <a:r>
-              <a:t>==========================================================</a:t>
-            </a:r>
-            <a:br/>
-            <a:br/>
-            <a:r>
-              <a:t>$ python3 site/verify_all_pages.py</a:t>
-            </a:r>
-            <a:br/>
-            <a:r>
-              <a:t>质量自检扫描完毕: 发现 0 个阻断错误, 0 个优化警告。</a:t>
-            </a:r>
-            <a:br/>
-            <a:r>
-              <a:t>✅ 全站 16 个子页面全部通过校验！</a:t>
+              <a:t>PPT 瑞士国际主义网格系统（Swiss Grid）成果：</a:t>
+            </a:r>
+          </a:p>
+          <a:p>
+            <a:pPr>
+              <a:spcBef>
+                <a:spcPts val="1400"/>
+              </a:spcBef>
+              <a:defRPr sz="1300">
+                <a:solidFill>
+                  <a:srgbClr val="4D6884"/>
+                </a:solidFill>
+              </a:defRPr>
+            </a:pPr>
+            <a:r>
+              <a:t>• 彻底去 AI 模板味：基于王牌PPT.pptx 确立‘零 Emoji、零浮动圆角软阴影卡片、1.3 倍行距’准则；</a:t>
+            </a:r>
+          </a:p>
+          <a:p>
+            <a:pPr>
+              <a:spcBef>
+                <a:spcPts val="1400"/>
+              </a:spcBef>
+              <a:defRPr sz="1300">
+                <a:solidFill>
+                  <a:srgbClr val="4D6884"/>
+                </a:solidFill>
+              </a:defRPr>
+            </a:pPr>
+            <a:r>
+              <a:t>• 高数据墨水比：以 1px 发丝边框与 Nature 规范三线表最大化呈现流体力学与算法数据密度；</a:t>
+            </a:r>
+          </a:p>
+          <a:p>
+            <a:pPr>
+              <a:spcBef>
+                <a:spcPts val="1400"/>
+              </a:spcBef>
+              <a:defRPr sz="1300">
+                <a:solidFill>
+                  <a:srgbClr val="4D6884"/>
+                </a:solidFill>
+              </a:defRPr>
+            </a:pPr>
+            <a:r>
+              <a:t>• 本汇报展示实操：本次组会演练的 16:9 宽屏文稿即为暑期在这套排版与美学规范上的现场落地检验！</a:t>
             </a:r>
           </a:p>
         </p:txBody>
@@ -3844,7 +3845,7 @@
               </a:defRPr>
             </a:pPr>
             <a:r>
-              <a:t>10 / SUMMARY OF SUMMER WORK AND NEXT STEPS</a:t>
+              <a:t>10 / DATA INTEGRITY AUDIT AND SUMMER WORK SUMMARY</a:t>
             </a:r>
           </a:p>
           <a:p>
@@ -3857,7 +3858,7 @@
               </a:defRPr>
             </a:pPr>
             <a:r>
-              <a:t>夯实底层基础，讲透流场机理，向九月大创考核及全国大赛备战冲刺</a:t>
+              <a:t>全链路诚信自检绿灯通过，暑期可视化与制图规范三大阵地成果盘点</a:t>
             </a:r>
           </a:p>
         </p:txBody>
@@ -4028,11 +4029,11 @@
               </a:defRPr>
             </a:pPr>
             <a:r>
-              <a:t>暑期工作大盘点</a:t>
+              <a:t>16页莫兰迪静态工作台</a:t>
             </a:r>
             <a:br/>
             <a:r>
-              <a:t>SUMMER ACHIEVEMENT</a:t>
+              <a:t>WEB VISUALIZATION</a:t>
             </a:r>
           </a:p>
           <a:p>
@@ -4047,7 +4048,7 @@
               </a:defRPr>
             </a:pPr>
             <a:r>
-              <a:t>完成 16 页莫兰迪工科纯静态科研工作台研发；首创 3×3 阵列四阶梯气动对比；完成 PPO 物理可达界限与收敛审计。</a:t>
+              <a:t>实现纯前端 &lt;0.5 ms 双线性切片推理；首创 3×3 九机阵列四阶梯协同偏航对比卡（增产达 24.04%）。</a:t>
             </a:r>
           </a:p>
         </p:txBody>
@@ -4101,11 +4102,11 @@
               </a:defRPr>
             </a:pPr>
             <a:r>
-              <a:t>九月开学考核目标</a:t>
+              <a:t>PS顶刊图与PPT网格体系</a:t>
             </a:r>
             <a:br/>
             <a:r>
-              <a:t>SEPTEMBER GOALS</a:t>
+              <a:t>PS / PPT STANDARDS</a:t>
             </a:r>
           </a:p>
           <a:p>
@@ -4120,7 +4121,7 @@
               </a:defRPr>
             </a:pPr>
             <a:r>
-              <a:t>依托《大白话自学通识手册》强化组会表达底气；与流场和控制组做结题汇报演示；编排大创中期答辩核心讲演书。</a:t>
+              <a:t>掌握 Nature 规格 300DPI 矢量图绘制；建立 Swiss Grid 1.3 倍行距、零 Emoji 极简学术演讲文稿体系。</a:t>
             </a:r>
           </a:p>
         </p:txBody>
@@ -4174,11 +4175,11 @@
               </a:defRPr>
             </a:pPr>
             <a:r>
-              <a:t>长期挑战杯与论文计划</a:t>
+              <a:t>全站诚信自检与规划</a:t>
             </a:r>
             <a:br/>
             <a:r>
-              <a:t>LONG-TERM VISION</a:t>
+              <a:t>INTEGRITY &amp; VISION</a:t>
             </a:r>
           </a:p>
           <a:p>
@@ -4193,7 +4194,7 @@
               </a:defRPr>
             </a:pPr>
             <a:r>
-              <a:t>按瑞士网格制作 20 页挑战杯全国赛 Deck；基于 generate_figure_psd.py 准备 300DPI 矢量排版图；实战防御评委质询。</a:t>
+              <a:t>通过 python3 check_contract.py 全站自检通过；清除陈旧伪数，迎接九月大创开学考核与挑战杯赛。</a:t>
             </a:r>
           </a:p>
         </p:txBody>

--- a/viz/8.23组会汇报_可视化暑期进展_孙承泽.pptx
+++ b/viz/8.23组会汇报_可视化暑期进展_孙承泽.pptx
@@ -7000,7 +7000,7 @@
             </a:r>
             <a:br/>
             <a:r>
-              <a:t>9934.99 kW (+22.72%)</a:t>
+              <a:t>9934.99 kW (+22.73%)</a:t>
             </a:r>
           </a:p>
           <a:p>

--- a/viz/8.23组会汇报_可视化暑期进展_孙承泽.pptx
+++ b/viz/8.23组会汇报_可视化暑期进展_孙承泽.pptx
@@ -4029,7 +4029,7 @@
               </a:defRPr>
             </a:pPr>
             <a:r>
-              <a:t>16页莫兰迪静态工作台</a:t>
+              <a:t>15页莫兰迪静态工作台</a:t>
             </a:r>
             <a:br/>
             <a:r>
@@ -5250,7 +5250,7 @@
             </a:r>
             <a:br/>
             <a:r>
-              <a:t>   统筹全系 16 个莫兰迪工科子网页研发，首创纯静态插值推理与全时段协同呈现！</a:t>
+              <a:t>   统筹全系 15 个莫兰迪工科页面研发，首创纯静态插值推理与全时段协同呈现！</a:t>
             </a:r>
           </a:p>
         </p:txBody>
